--- a/RESAI_mid_ppt.pptx
+++ b/RESAI_mid_ppt.pptx
@@ -2849,7 +2849,7 @@
                 <a:ea typeface="Montserrat Bold" pitchFamily="34" charset="-122"/>
                 <a:cs typeface="Montserrat Bold" pitchFamily="34" charset="-120"/>
               </a:rPr>
-              <a:t>Team Members</a:t>
+              <a:t>Author</a:t>
             </a:r>
             <a:endParaRPr lang="en-US" sz="2400" dirty="0">
               <a:latin typeface="Aptos" panose="020B0004020202020204" pitchFamily="34" charset="0"/>
@@ -2891,39 +2891,13 @@
               <a:buSzPct val="100000"/>
             </a:pPr>
             <a:r>
-              <a:rPr lang="en-US" sz="2000" dirty="0" err="1">
-                <a:solidFill>
-                  <a:srgbClr val="3D3838"/>
-                </a:solidFill>
-                <a:latin typeface="Aptos" panose="020B0004020202020204" pitchFamily="34" charset="0"/>
-              </a:rPr>
-              <a:t>Panuganti</a:t>
-            </a:r>
-            <a:r>
               <a:rPr lang="en-US" sz="2000" dirty="0">
                 <a:solidFill>
                   <a:srgbClr val="3D3838"/>
                 </a:solidFill>
                 <a:latin typeface="Aptos" panose="020B0004020202020204" pitchFamily="34" charset="0"/>
               </a:rPr>
-              <a:t> Bhanu – S20230030399</a:t>
-            </a:r>
-          </a:p>
-          <a:p>
-            <a:pPr algn="l">
-              <a:lnSpc>
-                <a:spcPct val="150000"/>
-              </a:lnSpc>
-              <a:buSzPct val="100000"/>
-            </a:pPr>
-            <a:r>
-              <a:rPr lang="en-US" sz="2000" dirty="0">
-                <a:solidFill>
-                  <a:srgbClr val="3D3838"/>
-                </a:solidFill>
-                <a:latin typeface="Aptos" panose="020B0004020202020204" pitchFamily="34" charset="0"/>
-              </a:rPr>
-              <a:t>Sambhav Jain – S20230030407</a:t>
+              <a:t>Sambhav Jain</a:t>
             </a:r>
             <a:endParaRPr lang="en-US" sz="2000" dirty="0">
               <a:latin typeface="Aptos" panose="020B0004020202020204" pitchFamily="34" charset="0"/>
